--- a/Manuscript/VisCalcML Figures.pptx
+++ b/Manuscript/VisCalcML Figures.pptx
@@ -14,12 +14,15 @@
     <p:sldId id="261" r:id="rId8"/>
     <p:sldId id="262" r:id="rId9"/>
     <p:sldId id="269" r:id="rId10"/>
-    <p:sldId id="264" r:id="rId11"/>
-    <p:sldId id="263" r:id="rId12"/>
-    <p:sldId id="265" r:id="rId13"/>
-    <p:sldId id="257" r:id="rId14"/>
-    <p:sldId id="266" r:id="rId15"/>
-    <p:sldId id="268" r:id="rId16"/>
+    <p:sldId id="271" r:id="rId11"/>
+    <p:sldId id="272" r:id="rId12"/>
+    <p:sldId id="273" r:id="rId13"/>
+    <p:sldId id="264" r:id="rId14"/>
+    <p:sldId id="263" r:id="rId15"/>
+    <p:sldId id="265" r:id="rId16"/>
+    <p:sldId id="257" r:id="rId17"/>
+    <p:sldId id="266" r:id="rId18"/>
+    <p:sldId id="268" r:id="rId19"/>
   </p:sldIdLst>
   <p:sldSz cx="12192000" cy="6858000"/>
   <p:notesSz cx="6858000" cy="9144000"/>
@@ -16470,7 +16473,7 @@
           <a:p>
             <a:fld id="{92669FB8-5ABC-47CA-9BD7-A0622C249EDD}" type="datetimeFigureOut">
               <a:rPr lang="en-US" smtClean="0"/>
-              <a:t>7/3/2024</a:t>
+              <a:t>8/28/2024</a:t>
             </a:fld>
             <a:endParaRPr lang="en-US"/>
           </a:p>
@@ -16668,7 +16671,7 @@
           <a:p>
             <a:fld id="{92669FB8-5ABC-47CA-9BD7-A0622C249EDD}" type="datetimeFigureOut">
               <a:rPr lang="en-US" smtClean="0"/>
-              <a:t>7/3/2024</a:t>
+              <a:t>8/28/2024</a:t>
             </a:fld>
             <a:endParaRPr lang="en-US"/>
           </a:p>
@@ -16876,7 +16879,7 @@
           <a:p>
             <a:fld id="{92669FB8-5ABC-47CA-9BD7-A0622C249EDD}" type="datetimeFigureOut">
               <a:rPr lang="en-US" smtClean="0"/>
-              <a:t>7/3/2024</a:t>
+              <a:t>8/28/2024</a:t>
             </a:fld>
             <a:endParaRPr lang="en-US"/>
           </a:p>
@@ -17074,7 +17077,7 @@
           <a:p>
             <a:fld id="{92669FB8-5ABC-47CA-9BD7-A0622C249EDD}" type="datetimeFigureOut">
               <a:rPr lang="en-US" smtClean="0"/>
-              <a:t>7/3/2024</a:t>
+              <a:t>8/28/2024</a:t>
             </a:fld>
             <a:endParaRPr lang="en-US"/>
           </a:p>
@@ -17349,7 +17352,7 @@
           <a:p>
             <a:fld id="{92669FB8-5ABC-47CA-9BD7-A0622C249EDD}" type="datetimeFigureOut">
               <a:rPr lang="en-US" smtClean="0"/>
-              <a:t>7/3/2024</a:t>
+              <a:t>8/28/2024</a:t>
             </a:fld>
             <a:endParaRPr lang="en-US"/>
           </a:p>
@@ -17614,7 +17617,7 @@
           <a:p>
             <a:fld id="{92669FB8-5ABC-47CA-9BD7-A0622C249EDD}" type="datetimeFigureOut">
               <a:rPr lang="en-US" smtClean="0"/>
-              <a:t>7/3/2024</a:t>
+              <a:t>8/28/2024</a:t>
             </a:fld>
             <a:endParaRPr lang="en-US"/>
           </a:p>
@@ -18026,7 +18029,7 @@
           <a:p>
             <a:fld id="{92669FB8-5ABC-47CA-9BD7-A0622C249EDD}" type="datetimeFigureOut">
               <a:rPr lang="en-US" smtClean="0"/>
-              <a:t>7/3/2024</a:t>
+              <a:t>8/28/2024</a:t>
             </a:fld>
             <a:endParaRPr lang="en-US"/>
           </a:p>
@@ -18167,7 +18170,7 @@
           <a:p>
             <a:fld id="{92669FB8-5ABC-47CA-9BD7-A0622C249EDD}" type="datetimeFigureOut">
               <a:rPr lang="en-US" smtClean="0"/>
-              <a:t>7/3/2024</a:t>
+              <a:t>8/28/2024</a:t>
             </a:fld>
             <a:endParaRPr lang="en-US"/>
           </a:p>
@@ -18280,7 +18283,7 @@
           <a:p>
             <a:fld id="{92669FB8-5ABC-47CA-9BD7-A0622C249EDD}" type="datetimeFigureOut">
               <a:rPr lang="en-US" smtClean="0"/>
-              <a:t>7/3/2024</a:t>
+              <a:t>8/28/2024</a:t>
             </a:fld>
             <a:endParaRPr lang="en-US"/>
           </a:p>
@@ -18591,7 +18594,7 @@
           <a:p>
             <a:fld id="{92669FB8-5ABC-47CA-9BD7-A0622C249EDD}" type="datetimeFigureOut">
               <a:rPr lang="en-US" smtClean="0"/>
-              <a:t>7/3/2024</a:t>
+              <a:t>8/28/2024</a:t>
             </a:fld>
             <a:endParaRPr lang="en-US"/>
           </a:p>
@@ -18879,7 +18882,7 @@
           <a:p>
             <a:fld id="{92669FB8-5ABC-47CA-9BD7-A0622C249EDD}" type="datetimeFigureOut">
               <a:rPr lang="en-US" smtClean="0"/>
-              <a:t>7/3/2024</a:t>
+              <a:t>8/28/2024</a:t>
             </a:fld>
             <a:endParaRPr lang="en-US"/>
           </a:p>
@@ -19120,7 +19123,7 @@
           <a:p>
             <a:fld id="{92669FB8-5ABC-47CA-9BD7-A0622C249EDD}" type="datetimeFigureOut">
               <a:rPr lang="en-US" smtClean="0"/>
-              <a:t>7/3/2024</a:t>
+              <a:t>8/28/2024</a:t>
             </a:fld>
             <a:endParaRPr lang="en-US"/>
           </a:p>
@@ -19679,6 +19682,1785 @@
           <p:cNvPr id="2" name="Title 1">
             <a:extLst>
               <a:ext uri="{FF2B5EF4-FFF2-40B4-BE49-F238E27FC236}">
+                <a16:creationId xmlns:a16="http://schemas.microsoft.com/office/drawing/2014/main" id="{34254567-C60D-1166-1284-187A94BB68FF}"/>
+              </a:ext>
+            </a:extLst>
+          </p:cNvPr>
+          <p:cNvSpPr>
+            <a:spLocks noGrp="1"/>
+          </p:cNvSpPr>
+          <p:nvPr>
+            <p:ph type="title"/>
+          </p:nvPr>
+        </p:nvSpPr>
+        <p:spPr/>
+        <p:txBody>
+          <a:bodyPr/>
+          <a:lstStyle/>
+          <a:p>
+            <a:r>
+              <a:rPr lang="en-US" dirty="0">
+                <a:latin typeface="Arial" panose="020B0604020202020204" pitchFamily="34" charset="0"/>
+                <a:cs typeface="Arial" panose="020B0604020202020204" pitchFamily="34" charset="0"/>
+              </a:rPr>
+              <a:t>Figure 5a</a:t>
+            </a:r>
+          </a:p>
+        </p:txBody>
+      </p:sp>
+      <p:pic>
+        <p:nvPicPr>
+          <p:cNvPr id="5" name="Content Placeholder 4">
+            <a:extLst>
+              <a:ext uri="{FF2B5EF4-FFF2-40B4-BE49-F238E27FC236}">
+                <a16:creationId xmlns:a16="http://schemas.microsoft.com/office/drawing/2014/main" id="{FB6BBCC1-A9F5-290A-9884-353CBC74F9C3}"/>
+              </a:ext>
+            </a:extLst>
+          </p:cNvPr>
+          <p:cNvPicPr>
+            <a:picLocks noGrp="1" noChangeAspect="1"/>
+          </p:cNvPicPr>
+          <p:nvPr>
+            <p:ph idx="1"/>
+          </p:nvPr>
+        </p:nvPicPr>
+        <p:blipFill>
+          <a:blip r:embed="rId2">
+            <a:extLst>
+              <a:ext uri="{28A0092B-C50C-407E-A947-70E740481C1C}">
+                <a14:useLocalDpi xmlns:a14="http://schemas.microsoft.com/office/drawing/2010/main" val="0"/>
+              </a:ext>
+            </a:extLst>
+          </a:blip>
+          <a:stretch>
+            <a:fillRect/>
+          </a:stretch>
+        </p:blipFill>
+        <p:spPr>
+          <a:xfrm>
+            <a:off x="3385226" y="1079881"/>
+            <a:ext cx="5801784" cy="4351338"/>
+          </a:xfrm>
+        </p:spPr>
+      </p:pic>
+      <p:sp>
+        <p:nvSpPr>
+          <p:cNvPr id="6" name="TextBox 5">
+            <a:extLst>
+              <a:ext uri="{FF2B5EF4-FFF2-40B4-BE49-F238E27FC236}">
+                <a16:creationId xmlns:a16="http://schemas.microsoft.com/office/drawing/2014/main" id="{3B74CC89-4B7D-2B84-7F08-92D543F97AED}"/>
+              </a:ext>
+            </a:extLst>
+          </p:cNvPr>
+          <p:cNvSpPr txBox="1"/>
+          <p:nvPr/>
+        </p:nvSpPr>
+        <p:spPr>
+          <a:xfrm>
+            <a:off x="3944885" y="5188650"/>
+            <a:ext cx="4682465" cy="369332"/>
+          </a:xfrm>
+          <a:prstGeom prst="rect">
+            <a:avLst/>
+          </a:prstGeom>
+          <a:noFill/>
+        </p:spPr>
+        <p:txBody>
+          <a:bodyPr wrap="square" rtlCol="0">
+            <a:spAutoFit/>
+          </a:bodyPr>
+          <a:lstStyle/>
+          <a:p>
+            <a:pPr algn="ctr"/>
+            <a:r>
+              <a:rPr lang="en-US" dirty="0">
+                <a:latin typeface="Arial" panose="020B0604020202020204" pitchFamily="34" charset="0"/>
+                <a:cs typeface="Arial" panose="020B0604020202020204" pitchFamily="34" charset="0"/>
+              </a:rPr>
+              <a:t>Predicted KV40 (</a:t>
+            </a:r>
+            <a:r>
+              <a:rPr lang="en-US" dirty="0" err="1">
+                <a:latin typeface="Arial" panose="020B0604020202020204" pitchFamily="34" charset="0"/>
+                <a:cs typeface="Arial" panose="020B0604020202020204" pitchFamily="34" charset="0"/>
+              </a:rPr>
+              <a:t>cSt</a:t>
+            </a:r>
+            <a:r>
+              <a:rPr lang="en-US" dirty="0">
+                <a:latin typeface="Arial" panose="020B0604020202020204" pitchFamily="34" charset="0"/>
+                <a:cs typeface="Arial" panose="020B0604020202020204" pitchFamily="34" charset="0"/>
+              </a:rPr>
+              <a:t>)</a:t>
+            </a:r>
+          </a:p>
+        </p:txBody>
+      </p:sp>
+      <p:sp>
+        <p:nvSpPr>
+          <p:cNvPr id="7" name="TextBox 6">
+            <a:extLst>
+              <a:ext uri="{FF2B5EF4-FFF2-40B4-BE49-F238E27FC236}">
+                <a16:creationId xmlns:a16="http://schemas.microsoft.com/office/drawing/2014/main" id="{8119D956-5A77-5B0B-55B7-7C29BDAFFAD2}"/>
+              </a:ext>
+            </a:extLst>
+          </p:cNvPr>
+          <p:cNvSpPr txBox="1"/>
+          <p:nvPr/>
+        </p:nvSpPr>
+        <p:spPr>
+          <a:xfrm rot="16200000">
+            <a:off x="1228660" y="3139882"/>
+            <a:ext cx="4682465" cy="369332"/>
+          </a:xfrm>
+          <a:prstGeom prst="rect">
+            <a:avLst/>
+          </a:prstGeom>
+          <a:noFill/>
+        </p:spPr>
+        <p:txBody>
+          <a:bodyPr wrap="square" rtlCol="0">
+            <a:spAutoFit/>
+          </a:bodyPr>
+          <a:lstStyle/>
+          <a:p>
+            <a:pPr algn="ctr"/>
+            <a:r>
+              <a:rPr lang="en-US" dirty="0">
+                <a:latin typeface="Arial" panose="020B0604020202020204" pitchFamily="34" charset="0"/>
+                <a:cs typeface="Arial" panose="020B0604020202020204" pitchFamily="34" charset="0"/>
+              </a:rPr>
+              <a:t>Number of Occurrences</a:t>
+            </a:r>
+          </a:p>
+        </p:txBody>
+      </p:sp>
+      <p:sp>
+        <p:nvSpPr>
+          <p:cNvPr id="10" name="TextBox 9">
+            <a:extLst>
+              <a:ext uri="{FF2B5EF4-FFF2-40B4-BE49-F238E27FC236}">
+                <a16:creationId xmlns:a16="http://schemas.microsoft.com/office/drawing/2014/main" id="{42E6B608-A0CC-8942-BFBB-8441D797AC6F}"/>
+              </a:ext>
+            </a:extLst>
+          </p:cNvPr>
+          <p:cNvSpPr txBox="1"/>
+          <p:nvPr/>
+        </p:nvSpPr>
+        <p:spPr>
+          <a:xfrm>
+            <a:off x="3569892" y="5544497"/>
+            <a:ext cx="5073134" cy="646331"/>
+          </a:xfrm>
+          <a:prstGeom prst="rect">
+            <a:avLst/>
+          </a:prstGeom>
+          <a:noFill/>
+        </p:spPr>
+        <p:txBody>
+          <a:bodyPr wrap="square" rtlCol="0">
+            <a:spAutoFit/>
+          </a:bodyPr>
+          <a:lstStyle/>
+          <a:p>
+            <a:r>
+              <a:rPr lang="en-US" b="1" dirty="0">
+                <a:latin typeface="Arial" panose="020B0604020202020204" pitchFamily="34" charset="0"/>
+                <a:cs typeface="Arial" panose="020B0604020202020204" pitchFamily="34" charset="0"/>
+              </a:rPr>
+              <a:t>Figure 5a</a:t>
+            </a:r>
+            <a:r>
+              <a:rPr lang="en-US" dirty="0">
+                <a:latin typeface="Arial" panose="020B0604020202020204" pitchFamily="34" charset="0"/>
+                <a:cs typeface="Arial" panose="020B0604020202020204" pitchFamily="34" charset="0"/>
+              </a:rPr>
+              <a:t>: Histogram of </a:t>
+            </a:r>
+            <a:r>
+              <a:rPr lang="en-US" dirty="0" err="1">
+                <a:latin typeface="Arial" panose="020B0604020202020204" pitchFamily="34" charset="0"/>
+                <a:cs typeface="Arial" panose="020B0604020202020204" pitchFamily="34" charset="0"/>
+              </a:rPr>
+              <a:t>VisCalcML</a:t>
+            </a:r>
+            <a:r>
+              <a:rPr lang="en-US" dirty="0">
+                <a:latin typeface="Arial" panose="020B0604020202020204" pitchFamily="34" charset="0"/>
+                <a:cs typeface="Arial" panose="020B0604020202020204" pitchFamily="34" charset="0"/>
+              </a:rPr>
+              <a:t>-predicted KV40 for expert-curated C</a:t>
+            </a:r>
+            <a:r>
+              <a:rPr lang="en-US" baseline="-25000" dirty="0">
+                <a:latin typeface="Arial" panose="020B0604020202020204" pitchFamily="34" charset="0"/>
+                <a:cs typeface="Arial" panose="020B0604020202020204" pitchFamily="34" charset="0"/>
+              </a:rPr>
+              <a:t>30</a:t>
+            </a:r>
+            <a:r>
+              <a:rPr lang="en-US" dirty="0">
+                <a:latin typeface="Arial" panose="020B0604020202020204" pitchFamily="34" charset="0"/>
+                <a:cs typeface="Arial" panose="020B0604020202020204" pitchFamily="34" charset="0"/>
+              </a:rPr>
+              <a:t> molecules. </a:t>
+            </a:r>
+          </a:p>
+        </p:txBody>
+      </p:sp>
+    </p:spTree>
+    <p:extLst>
+      <p:ext uri="{BB962C8B-B14F-4D97-AF65-F5344CB8AC3E}">
+        <p14:creationId xmlns:p14="http://schemas.microsoft.com/office/powerpoint/2010/main" val="4231531305"/>
+      </p:ext>
+    </p:extLst>
+  </p:cSld>
+  <p:clrMapOvr>
+    <a:masterClrMapping/>
+  </p:clrMapOvr>
+</p:sld>
+</file>
+
+<file path=ppt/slides/slide11.xml><?xml version="1.0" encoding="utf-8"?>
+<p:sld xmlns:a="http://schemas.openxmlformats.org/drawingml/2006/main" xmlns:r="http://schemas.openxmlformats.org/officeDocument/2006/relationships" xmlns:p="http://schemas.openxmlformats.org/presentationml/2006/main">
+  <p:cSld>
+    <p:spTree>
+      <p:nvGrpSpPr>
+        <p:cNvPr id="1" name=""/>
+        <p:cNvGrpSpPr/>
+        <p:nvPr/>
+      </p:nvGrpSpPr>
+      <p:grpSpPr>
+        <a:xfrm>
+          <a:off x="0" y="0"/>
+          <a:ext cx="0" cy="0"/>
+          <a:chOff x="0" y="0"/>
+          <a:chExt cx="0" cy="0"/>
+        </a:xfrm>
+      </p:grpSpPr>
+      <p:sp>
+        <p:nvSpPr>
+          <p:cNvPr id="2" name="Title 1">
+            <a:extLst>
+              <a:ext uri="{FF2B5EF4-FFF2-40B4-BE49-F238E27FC236}">
+                <a16:creationId xmlns:a16="http://schemas.microsoft.com/office/drawing/2014/main" id="{34254567-C60D-1166-1284-187A94BB68FF}"/>
+              </a:ext>
+            </a:extLst>
+          </p:cNvPr>
+          <p:cNvSpPr>
+            <a:spLocks noGrp="1"/>
+          </p:cNvSpPr>
+          <p:nvPr>
+            <p:ph type="title"/>
+          </p:nvPr>
+        </p:nvSpPr>
+        <p:spPr/>
+        <p:txBody>
+          <a:bodyPr/>
+          <a:lstStyle/>
+          <a:p>
+            <a:r>
+              <a:rPr lang="en-US" dirty="0">
+                <a:latin typeface="Arial" panose="020B0604020202020204" pitchFamily="34" charset="0"/>
+                <a:cs typeface="Arial" panose="020B0604020202020204" pitchFamily="34" charset="0"/>
+              </a:rPr>
+              <a:t>Figure 5b</a:t>
+            </a:r>
+          </a:p>
+        </p:txBody>
+      </p:sp>
+      <p:sp>
+        <p:nvSpPr>
+          <p:cNvPr id="8" name="Arrow: Left-Right 7">
+            <a:extLst>
+              <a:ext uri="{FF2B5EF4-FFF2-40B4-BE49-F238E27FC236}">
+                <a16:creationId xmlns:a16="http://schemas.microsoft.com/office/drawing/2014/main" id="{83E12346-EB58-720E-50A7-0EAC6B4B21CE}"/>
+              </a:ext>
+            </a:extLst>
+          </p:cNvPr>
+          <p:cNvSpPr/>
+          <p:nvPr/>
+        </p:nvSpPr>
+        <p:spPr>
+          <a:xfrm>
+            <a:off x="1037138" y="3788268"/>
+            <a:ext cx="5913994" cy="822319"/>
+          </a:xfrm>
+          <a:prstGeom prst="leftRightArrow">
+            <a:avLst/>
+          </a:prstGeom>
+          <a:gradFill>
+            <a:gsLst>
+              <a:gs pos="0">
+                <a:schemeClr val="accent1">
+                  <a:shade val="30000"/>
+                  <a:satMod val="115000"/>
+                  <a:alpha val="0"/>
+                </a:schemeClr>
+              </a:gs>
+              <a:gs pos="50000">
+                <a:schemeClr val="accent1">
+                  <a:shade val="67500"/>
+                  <a:satMod val="115000"/>
+                </a:schemeClr>
+              </a:gs>
+              <a:gs pos="100000">
+                <a:schemeClr val="accent1">
+                  <a:shade val="100000"/>
+                  <a:satMod val="115000"/>
+                </a:schemeClr>
+              </a:gs>
+            </a:gsLst>
+            <a:lin ang="0" scaled="0"/>
+          </a:gradFill>
+        </p:spPr>
+        <p:style>
+          <a:lnRef idx="2">
+            <a:schemeClr val="accent1">
+              <a:shade val="15000"/>
+            </a:schemeClr>
+          </a:lnRef>
+          <a:fillRef idx="1">
+            <a:schemeClr val="accent1"/>
+          </a:fillRef>
+          <a:effectRef idx="0">
+            <a:schemeClr val="accent1"/>
+          </a:effectRef>
+          <a:fontRef idx="minor">
+            <a:schemeClr val="lt1"/>
+          </a:fontRef>
+        </p:style>
+        <p:txBody>
+          <a:bodyPr rtlCol="0" anchor="ctr"/>
+          <a:lstStyle/>
+          <a:p>
+            <a:pPr algn="ctr"/>
+            <a:endParaRPr lang="en-US">
+              <a:latin typeface="Arial" panose="020B0604020202020204" pitchFamily="34" charset="0"/>
+              <a:cs typeface="Arial" panose="020B0604020202020204" pitchFamily="34" charset="0"/>
+            </a:endParaRPr>
+          </a:p>
+        </p:txBody>
+      </p:sp>
+      <p:sp>
+        <p:nvSpPr>
+          <p:cNvPr id="9" name="TextBox 8">
+            <a:extLst>
+              <a:ext uri="{FF2B5EF4-FFF2-40B4-BE49-F238E27FC236}">
+                <a16:creationId xmlns:a16="http://schemas.microsoft.com/office/drawing/2014/main" id="{6785304B-7CD6-7A5B-0643-D2181824B42D}"/>
+              </a:ext>
+            </a:extLst>
+          </p:cNvPr>
+          <p:cNvSpPr txBox="1"/>
+          <p:nvPr/>
+        </p:nvSpPr>
+        <p:spPr>
+          <a:xfrm>
+            <a:off x="-210532" y="4693404"/>
+            <a:ext cx="4682465" cy="369332"/>
+          </a:xfrm>
+          <a:prstGeom prst="rect">
+            <a:avLst/>
+          </a:prstGeom>
+          <a:noFill/>
+        </p:spPr>
+        <p:txBody>
+          <a:bodyPr wrap="square" rtlCol="0">
+            <a:spAutoFit/>
+          </a:bodyPr>
+          <a:lstStyle/>
+          <a:p>
+            <a:pPr algn="ctr"/>
+            <a:r>
+              <a:rPr lang="en-US" dirty="0">
+                <a:latin typeface="Arial" panose="020B0604020202020204" pitchFamily="34" charset="0"/>
+                <a:cs typeface="Arial" panose="020B0604020202020204" pitchFamily="34" charset="0"/>
+              </a:rPr>
+              <a:t>Low Predicted KV40</a:t>
+            </a:r>
+          </a:p>
+        </p:txBody>
+      </p:sp>
+      <p:sp>
+        <p:nvSpPr>
+          <p:cNvPr id="11" name="TextBox 10">
+            <a:extLst>
+              <a:ext uri="{FF2B5EF4-FFF2-40B4-BE49-F238E27FC236}">
+                <a16:creationId xmlns:a16="http://schemas.microsoft.com/office/drawing/2014/main" id="{8A99FC93-15BA-A01E-DC06-8C6B3C9A8EC3}"/>
+              </a:ext>
+            </a:extLst>
+          </p:cNvPr>
+          <p:cNvSpPr txBox="1"/>
+          <p:nvPr/>
+        </p:nvSpPr>
+        <p:spPr>
+          <a:xfrm>
+            <a:off x="3457696" y="4690827"/>
+            <a:ext cx="4682465" cy="369332"/>
+          </a:xfrm>
+          <a:prstGeom prst="rect">
+            <a:avLst/>
+          </a:prstGeom>
+          <a:noFill/>
+        </p:spPr>
+        <p:txBody>
+          <a:bodyPr wrap="square" rtlCol="0">
+            <a:spAutoFit/>
+          </a:bodyPr>
+          <a:lstStyle/>
+          <a:p>
+            <a:pPr algn="ctr"/>
+            <a:r>
+              <a:rPr lang="en-US" dirty="0">
+                <a:latin typeface="Arial" panose="020B0604020202020204" pitchFamily="34" charset="0"/>
+                <a:cs typeface="Arial" panose="020B0604020202020204" pitchFamily="34" charset="0"/>
+              </a:rPr>
+              <a:t>High Predicted KV40</a:t>
+            </a:r>
+          </a:p>
+        </p:txBody>
+      </p:sp>
+      <p:sp>
+        <p:nvSpPr>
+          <p:cNvPr id="12" name="TextBox 11">
+            <a:extLst>
+              <a:ext uri="{FF2B5EF4-FFF2-40B4-BE49-F238E27FC236}">
+                <a16:creationId xmlns:a16="http://schemas.microsoft.com/office/drawing/2014/main" id="{6BCF500C-00EA-5681-A1DB-26D59E319228}"/>
+              </a:ext>
+            </a:extLst>
+          </p:cNvPr>
+          <p:cNvSpPr txBox="1"/>
+          <p:nvPr/>
+        </p:nvSpPr>
+        <p:spPr>
+          <a:xfrm>
+            <a:off x="1513847" y="5259703"/>
+            <a:ext cx="5073134" cy="1200329"/>
+          </a:xfrm>
+          <a:prstGeom prst="rect">
+            <a:avLst/>
+          </a:prstGeom>
+          <a:noFill/>
+        </p:spPr>
+        <p:txBody>
+          <a:bodyPr wrap="square" rtlCol="0">
+            <a:spAutoFit/>
+          </a:bodyPr>
+          <a:lstStyle/>
+          <a:p>
+            <a:r>
+              <a:rPr lang="en-US" b="1" dirty="0">
+                <a:latin typeface="Arial" panose="020B0604020202020204" pitchFamily="34" charset="0"/>
+                <a:cs typeface="Arial" panose="020B0604020202020204" pitchFamily="34" charset="0"/>
+              </a:rPr>
+              <a:t>Figure 5b</a:t>
+            </a:r>
+            <a:r>
+              <a:rPr lang="en-US" dirty="0">
+                <a:latin typeface="Arial" panose="020B0604020202020204" pitchFamily="34" charset="0"/>
+                <a:cs typeface="Arial" panose="020B0604020202020204" pitchFamily="34" charset="0"/>
+              </a:rPr>
+              <a:t>: Relative differences in </a:t>
+            </a:r>
+            <a:r>
+              <a:rPr lang="en-US" dirty="0" err="1">
+                <a:latin typeface="Arial" panose="020B0604020202020204" pitchFamily="34" charset="0"/>
+                <a:cs typeface="Arial" panose="020B0604020202020204" pitchFamily="34" charset="0"/>
+              </a:rPr>
+              <a:t>VisCalcML</a:t>
+            </a:r>
+            <a:r>
+              <a:rPr lang="en-US" dirty="0">
+                <a:latin typeface="Arial" panose="020B0604020202020204" pitchFamily="34" charset="0"/>
+                <a:cs typeface="Arial" panose="020B0604020202020204" pitchFamily="34" charset="0"/>
+              </a:rPr>
+              <a:t>-predicted KV40 for select expert-curated C</a:t>
+            </a:r>
+            <a:r>
+              <a:rPr lang="en-US" baseline="-25000" dirty="0">
+                <a:latin typeface="Arial" panose="020B0604020202020204" pitchFamily="34" charset="0"/>
+                <a:cs typeface="Arial" panose="020B0604020202020204" pitchFamily="34" charset="0"/>
+              </a:rPr>
+              <a:t>30</a:t>
+            </a:r>
+            <a:r>
+              <a:rPr lang="en-US" dirty="0">
+                <a:latin typeface="Arial" panose="020B0604020202020204" pitchFamily="34" charset="0"/>
+                <a:cs typeface="Arial" panose="020B0604020202020204" pitchFamily="34" charset="0"/>
+              </a:rPr>
+              <a:t> molecules. </a:t>
+            </a:r>
+          </a:p>
+          <a:p>
+            <a:endParaRPr lang="en-US" dirty="0">
+              <a:latin typeface="Arial" panose="020B0604020202020204" pitchFamily="34" charset="0"/>
+              <a:cs typeface="Arial" panose="020B0604020202020204" pitchFamily="34" charset="0"/>
+            </a:endParaRPr>
+          </a:p>
+        </p:txBody>
+      </p:sp>
+      <p:pic>
+        <p:nvPicPr>
+          <p:cNvPr id="16" name="Picture 15">
+            <a:extLst>
+              <a:ext uri="{FF2B5EF4-FFF2-40B4-BE49-F238E27FC236}">
+                <a16:creationId xmlns:a16="http://schemas.microsoft.com/office/drawing/2014/main" id="{E12778FA-63EC-99FC-24C9-5CE36CEBB801}"/>
+              </a:ext>
+            </a:extLst>
+          </p:cNvPr>
+          <p:cNvPicPr>
+            <a:picLocks noChangeAspect="1"/>
+          </p:cNvPicPr>
+          <p:nvPr/>
+        </p:nvPicPr>
+        <p:blipFill rotWithShape="1">
+          <a:blip r:embed="rId2">
+            <a:extLst>
+              <a:ext uri="{28A0092B-C50C-407E-A947-70E740481C1C}">
+                <a14:useLocalDpi xmlns:a14="http://schemas.microsoft.com/office/drawing/2010/main" val="0"/>
+              </a:ext>
+            </a:extLst>
+          </a:blip>
+          <a:srcRect t="38775" b="37366"/>
+          <a:stretch/>
+        </p:blipFill>
+        <p:spPr>
+          <a:xfrm rot="1364140">
+            <a:off x="760657" y="3071361"/>
+            <a:ext cx="2179268" cy="519954"/>
+          </a:xfrm>
+          <a:prstGeom prst="rect">
+            <a:avLst/>
+          </a:prstGeom>
+        </p:spPr>
+      </p:pic>
+      <p:pic>
+        <p:nvPicPr>
+          <p:cNvPr id="22" name="Picture 21">
+            <a:extLst>
+              <a:ext uri="{FF2B5EF4-FFF2-40B4-BE49-F238E27FC236}">
+                <a16:creationId xmlns:a16="http://schemas.microsoft.com/office/drawing/2014/main" id="{6BA6E192-6408-112F-7A3A-B3668BE7269D}"/>
+              </a:ext>
+            </a:extLst>
+          </p:cNvPr>
+          <p:cNvPicPr>
+            <a:picLocks noChangeAspect="1"/>
+          </p:cNvPicPr>
+          <p:nvPr/>
+        </p:nvPicPr>
+        <p:blipFill rotWithShape="1">
+          <a:blip r:embed="rId3">
+            <a:extLst>
+              <a:ext uri="{28A0092B-C50C-407E-A947-70E740481C1C}">
+                <a14:useLocalDpi xmlns:a14="http://schemas.microsoft.com/office/drawing/2010/main" val="0"/>
+              </a:ext>
+            </a:extLst>
+          </a:blip>
+          <a:srcRect l="3096" t="23929" r="3910" b="22430"/>
+          <a:stretch/>
+        </p:blipFill>
+        <p:spPr>
+          <a:xfrm>
+            <a:off x="4948150" y="2548837"/>
+            <a:ext cx="2005155" cy="1156614"/>
+          </a:xfrm>
+          <a:prstGeom prst="rect">
+            <a:avLst/>
+          </a:prstGeom>
+        </p:spPr>
+      </p:pic>
+      <p:pic>
+        <p:nvPicPr>
+          <p:cNvPr id="24" name="Picture 23">
+            <a:extLst>
+              <a:ext uri="{FF2B5EF4-FFF2-40B4-BE49-F238E27FC236}">
+                <a16:creationId xmlns:a16="http://schemas.microsoft.com/office/drawing/2014/main" id="{B605D53E-4316-02F5-F51C-45627819DB5C}"/>
+              </a:ext>
+            </a:extLst>
+          </p:cNvPr>
+          <p:cNvPicPr>
+            <a:picLocks noChangeAspect="1"/>
+          </p:cNvPicPr>
+          <p:nvPr/>
+        </p:nvPicPr>
+        <p:blipFill rotWithShape="1">
+          <a:blip r:embed="rId4">
+            <a:extLst>
+              <a:ext uri="{28A0092B-C50C-407E-A947-70E740481C1C}">
+                <a14:useLocalDpi xmlns:a14="http://schemas.microsoft.com/office/drawing/2010/main" val="0"/>
+              </a:ext>
+            </a:extLst>
+          </a:blip>
+          <a:srcRect l="3754" t="26657" r="3347" b="26759"/>
+          <a:stretch/>
+        </p:blipFill>
+        <p:spPr>
+          <a:xfrm>
+            <a:off x="3066123" y="2835320"/>
+            <a:ext cx="2152037" cy="1079115"/>
+          </a:xfrm>
+          <a:prstGeom prst="rect">
+            <a:avLst/>
+          </a:prstGeom>
+        </p:spPr>
+      </p:pic>
+      <p:pic>
+        <p:nvPicPr>
+          <p:cNvPr id="26" name="Picture 25">
+            <a:extLst>
+              <a:ext uri="{FF2B5EF4-FFF2-40B4-BE49-F238E27FC236}">
+                <a16:creationId xmlns:a16="http://schemas.microsoft.com/office/drawing/2014/main" id="{F42D419A-1115-4533-D1E9-79DFED6A2390}"/>
+              </a:ext>
+            </a:extLst>
+          </p:cNvPr>
+          <p:cNvPicPr>
+            <a:picLocks noChangeAspect="1"/>
+          </p:cNvPicPr>
+          <p:nvPr/>
+        </p:nvPicPr>
+        <p:blipFill rotWithShape="1">
+          <a:blip r:embed="rId5">
+            <a:extLst>
+              <a:ext uri="{28A0092B-C50C-407E-A947-70E740481C1C}">
+                <a14:useLocalDpi xmlns:a14="http://schemas.microsoft.com/office/drawing/2010/main" val="0"/>
+              </a:ext>
+            </a:extLst>
+          </a:blip>
+          <a:srcRect t="38399" b="38024"/>
+          <a:stretch/>
+        </p:blipFill>
+        <p:spPr>
+          <a:xfrm rot="1432924">
+            <a:off x="659925" y="2427096"/>
+            <a:ext cx="2380731" cy="561312"/>
+          </a:xfrm>
+          <a:prstGeom prst="rect">
+            <a:avLst/>
+          </a:prstGeom>
+        </p:spPr>
+      </p:pic>
+      <p:sp>
+        <p:nvSpPr>
+          <p:cNvPr id="13" name="TextBox 12">
+            <a:extLst>
+              <a:ext uri="{FF2B5EF4-FFF2-40B4-BE49-F238E27FC236}">
+                <a16:creationId xmlns:a16="http://schemas.microsoft.com/office/drawing/2014/main" id="{39E67864-0132-82CB-B119-D66D47F046EE}"/>
+              </a:ext>
+            </a:extLst>
+          </p:cNvPr>
+          <p:cNvSpPr txBox="1"/>
+          <p:nvPr/>
+        </p:nvSpPr>
+        <p:spPr>
+          <a:xfrm>
+            <a:off x="7045176" y="104576"/>
+            <a:ext cx="5082672" cy="2508379"/>
+          </a:xfrm>
+          <a:prstGeom prst="rect">
+            <a:avLst/>
+          </a:prstGeom>
+          <a:noFill/>
+        </p:spPr>
+        <p:txBody>
+          <a:bodyPr wrap="square" rtlCol="0">
+            <a:spAutoFit/>
+          </a:bodyPr>
+          <a:lstStyle/>
+          <a:p>
+            <a:endParaRPr lang="en-US" dirty="0">
+              <a:latin typeface="Arial" panose="020B0604020202020204" pitchFamily="34" charset="0"/>
+              <a:cs typeface="Arial" panose="020B0604020202020204" pitchFamily="34" charset="0"/>
+            </a:endParaRPr>
+          </a:p>
+          <a:p>
+            <a:r>
+              <a:rPr lang="en-US" dirty="0">
+                <a:latin typeface="Arial" panose="020B0604020202020204" pitchFamily="34" charset="0"/>
+                <a:cs typeface="Arial" panose="020B0604020202020204" pitchFamily="34" charset="0"/>
+              </a:rPr>
+              <a:t>SMILES strings from left to right (for reference):</a:t>
+            </a:r>
+          </a:p>
+          <a:p>
+            <a:r>
+              <a:rPr lang="en-US" sz="1100" dirty="0">
+                <a:latin typeface="Arial" panose="020B0604020202020204" pitchFamily="34" charset="0"/>
+                <a:cs typeface="Arial" panose="020B0604020202020204" pitchFamily="34" charset="0"/>
+              </a:rPr>
+              <a:t>1. (Left-top)</a:t>
+            </a:r>
+          </a:p>
+          <a:p>
+            <a:r>
+              <a:rPr lang="en-US" sz="1100" dirty="0">
+                <a:latin typeface="Arial" panose="020B0604020202020204" pitchFamily="34" charset="0"/>
+                <a:cs typeface="Arial" panose="020B0604020202020204" pitchFamily="34" charset="0"/>
+              </a:rPr>
+              <a:t>'CCC[C@@H](C)C[C@H](C)C[C@@H](C)C[C@H](C)C[C@@H](C)C[C@H](C)C[C@@H](C)C[C@H](C)CC(C)C’</a:t>
+            </a:r>
+          </a:p>
+          <a:p>
+            <a:r>
+              <a:rPr lang="en-US" sz="1100" dirty="0">
+                <a:latin typeface="Arial" panose="020B0604020202020204" pitchFamily="34" charset="0"/>
+                <a:cs typeface="Arial" panose="020B0604020202020204" pitchFamily="34" charset="0"/>
+              </a:rPr>
+              <a:t>2.(Left-bottom) 'CCC[C@@H](C)C[C@@H](C)C[C@@H](C)C[C@@H](C)C[C@@H](C)C[C@@H](C)C[C@@H](C)C[C@@H](C)CC(C)C’</a:t>
+            </a:r>
+          </a:p>
+          <a:p>
+            <a:r>
+              <a:rPr lang="en-US" sz="1100" dirty="0">
+                <a:latin typeface="Arial" panose="020B0604020202020204" pitchFamily="34" charset="0"/>
+                <a:cs typeface="Arial" panose="020B0604020202020204" pitchFamily="34" charset="0"/>
+              </a:rPr>
+              <a:t>3. (Middle)</a:t>
+            </a:r>
+          </a:p>
+          <a:p>
+            <a:r>
+              <a:rPr lang="en-US" sz="1100" dirty="0">
+                <a:latin typeface="Arial" panose="020B0604020202020204" pitchFamily="34" charset="0"/>
+                <a:cs typeface="Arial" panose="020B0604020202020204" pitchFamily="34" charset="0"/>
+              </a:rPr>
+              <a:t>'CCCCCCCC[C@@H](CCCCCC)C[C@@H](CCCCCC)C[C@H](C)CCCCCC’</a:t>
+            </a:r>
+          </a:p>
+          <a:p>
+            <a:r>
+              <a:rPr lang="en-US" sz="1100" dirty="0">
+                <a:latin typeface="Arial" panose="020B0604020202020204" pitchFamily="34" charset="0"/>
+                <a:cs typeface="Arial" panose="020B0604020202020204" pitchFamily="34" charset="0"/>
+              </a:rPr>
+              <a:t>4. (Right)</a:t>
+            </a:r>
+          </a:p>
+          <a:p>
+            <a:r>
+              <a:rPr lang="en-US" sz="1100" dirty="0">
+                <a:latin typeface="Arial" panose="020B0604020202020204" pitchFamily="34" charset="0"/>
+                <a:cs typeface="Arial" panose="020B0604020202020204" pitchFamily="34" charset="0"/>
+              </a:rPr>
+              <a:t>'CCCCCCc1ccc(CCCCCC)c(CCCCCC)c1CCCCCC'</a:t>
+            </a:r>
+          </a:p>
+          <a:p>
+            <a:endParaRPr lang="en-US" sz="1100" dirty="0">
+              <a:latin typeface="Arial" panose="020B0604020202020204" pitchFamily="34" charset="0"/>
+              <a:cs typeface="Arial" panose="020B0604020202020204" pitchFamily="34" charset="0"/>
+            </a:endParaRPr>
+          </a:p>
+        </p:txBody>
+      </p:sp>
+      <p:sp>
+        <p:nvSpPr>
+          <p:cNvPr id="14" name="TextBox 13">
+            <a:extLst>
+              <a:ext uri="{FF2B5EF4-FFF2-40B4-BE49-F238E27FC236}">
+                <a16:creationId xmlns:a16="http://schemas.microsoft.com/office/drawing/2014/main" id="{957A91AF-E061-55B2-1AD1-8A2E0A6CF80A}"/>
+              </a:ext>
+            </a:extLst>
+          </p:cNvPr>
+          <p:cNvSpPr txBox="1"/>
+          <p:nvPr/>
+        </p:nvSpPr>
+        <p:spPr>
+          <a:xfrm>
+            <a:off x="1269357" y="1627236"/>
+            <a:ext cx="1161866" cy="369332"/>
+          </a:xfrm>
+          <a:prstGeom prst="rect">
+            <a:avLst/>
+          </a:prstGeom>
+          <a:noFill/>
+        </p:spPr>
+        <p:txBody>
+          <a:bodyPr wrap="square" rtlCol="0">
+            <a:spAutoFit/>
+          </a:bodyPr>
+          <a:lstStyle/>
+          <a:p>
+            <a:pPr algn="ctr"/>
+            <a:r>
+              <a:rPr lang="en-US" dirty="0">
+                <a:latin typeface="Arial" panose="020B0604020202020204" pitchFamily="34" charset="0"/>
+                <a:cs typeface="Arial" panose="020B0604020202020204" pitchFamily="34" charset="0"/>
+              </a:rPr>
+              <a:t>5.41 </a:t>
+            </a:r>
+            <a:r>
+              <a:rPr lang="en-US" dirty="0" err="1">
+                <a:latin typeface="Arial" panose="020B0604020202020204" pitchFamily="34" charset="0"/>
+                <a:cs typeface="Arial" panose="020B0604020202020204" pitchFamily="34" charset="0"/>
+              </a:rPr>
+              <a:t>cSt</a:t>
+            </a:r>
+            <a:endParaRPr lang="en-US" dirty="0">
+              <a:latin typeface="Arial" panose="020B0604020202020204" pitchFamily="34" charset="0"/>
+              <a:cs typeface="Arial" panose="020B0604020202020204" pitchFamily="34" charset="0"/>
+            </a:endParaRPr>
+          </a:p>
+        </p:txBody>
+      </p:sp>
+      <p:cxnSp>
+        <p:nvCxnSpPr>
+          <p:cNvPr id="17" name="Straight Arrow Connector 16">
+            <a:extLst>
+              <a:ext uri="{FF2B5EF4-FFF2-40B4-BE49-F238E27FC236}">
+                <a16:creationId xmlns:a16="http://schemas.microsoft.com/office/drawing/2014/main" id="{BBED1FCC-D835-3387-0755-89052D3B5E18}"/>
+              </a:ext>
+            </a:extLst>
+          </p:cNvPr>
+          <p:cNvCxnSpPr>
+            <a:stCxn id="14" idx="2"/>
+          </p:cNvCxnSpPr>
+          <p:nvPr/>
+        </p:nvCxnSpPr>
+        <p:spPr>
+          <a:xfrm flipH="1">
+            <a:off x="1773568" y="1996568"/>
+            <a:ext cx="76722" cy="476904"/>
+          </a:xfrm>
+          <a:prstGeom prst="straightConnector1">
+            <a:avLst/>
+          </a:prstGeom>
+          <a:ln>
+            <a:tailEnd type="triangle"/>
+          </a:ln>
+        </p:spPr>
+        <p:style>
+          <a:lnRef idx="1">
+            <a:schemeClr val="accent1"/>
+          </a:lnRef>
+          <a:fillRef idx="0">
+            <a:schemeClr val="accent1"/>
+          </a:fillRef>
+          <a:effectRef idx="0">
+            <a:schemeClr val="accent1"/>
+          </a:effectRef>
+          <a:fontRef idx="minor">
+            <a:schemeClr val="tx1"/>
+          </a:fontRef>
+        </p:style>
+      </p:cxnSp>
+      <p:cxnSp>
+        <p:nvCxnSpPr>
+          <p:cNvPr id="18" name="Straight Arrow Connector 17">
+            <a:extLst>
+              <a:ext uri="{FF2B5EF4-FFF2-40B4-BE49-F238E27FC236}">
+                <a16:creationId xmlns:a16="http://schemas.microsoft.com/office/drawing/2014/main" id="{212E6FC9-FD7B-586A-9AB6-55F7D92C175A}"/>
+              </a:ext>
+            </a:extLst>
+          </p:cNvPr>
+          <p:cNvCxnSpPr>
+            <a:cxnSpLocks/>
+            <a:stCxn id="14" idx="2"/>
+          </p:cNvCxnSpPr>
+          <p:nvPr/>
+        </p:nvCxnSpPr>
+        <p:spPr>
+          <a:xfrm>
+            <a:off x="1850290" y="1996568"/>
+            <a:ext cx="346725" cy="1306067"/>
+          </a:xfrm>
+          <a:prstGeom prst="straightConnector1">
+            <a:avLst/>
+          </a:prstGeom>
+          <a:ln>
+            <a:tailEnd type="triangle"/>
+          </a:ln>
+        </p:spPr>
+        <p:style>
+          <a:lnRef idx="1">
+            <a:schemeClr val="accent1"/>
+          </a:lnRef>
+          <a:fillRef idx="0">
+            <a:schemeClr val="accent1"/>
+          </a:fillRef>
+          <a:effectRef idx="0">
+            <a:schemeClr val="accent1"/>
+          </a:effectRef>
+          <a:fontRef idx="minor">
+            <a:schemeClr val="tx1"/>
+          </a:fontRef>
+        </p:style>
+      </p:cxnSp>
+      <p:sp>
+        <p:nvSpPr>
+          <p:cNvPr id="21" name="TextBox 20">
+            <a:extLst>
+              <a:ext uri="{FF2B5EF4-FFF2-40B4-BE49-F238E27FC236}">
+                <a16:creationId xmlns:a16="http://schemas.microsoft.com/office/drawing/2014/main" id="{B0F9A3B8-7F60-42B8-E815-FA0C5A9077F6}"/>
+              </a:ext>
+            </a:extLst>
+          </p:cNvPr>
+          <p:cNvSpPr txBox="1"/>
+          <p:nvPr/>
+        </p:nvSpPr>
+        <p:spPr>
+          <a:xfrm>
+            <a:off x="3165144" y="2139168"/>
+            <a:ext cx="1161866" cy="369332"/>
+          </a:xfrm>
+          <a:prstGeom prst="rect">
+            <a:avLst/>
+          </a:prstGeom>
+          <a:noFill/>
+        </p:spPr>
+        <p:txBody>
+          <a:bodyPr wrap="square" rtlCol="0">
+            <a:spAutoFit/>
+          </a:bodyPr>
+          <a:lstStyle/>
+          <a:p>
+            <a:pPr algn="ctr"/>
+            <a:r>
+              <a:rPr lang="en-US" dirty="0">
+                <a:latin typeface="Arial" panose="020B0604020202020204" pitchFamily="34" charset="0"/>
+                <a:cs typeface="Arial" panose="020B0604020202020204" pitchFamily="34" charset="0"/>
+              </a:rPr>
+              <a:t>19.17 </a:t>
+            </a:r>
+            <a:r>
+              <a:rPr lang="en-US" dirty="0" err="1">
+                <a:latin typeface="Arial" panose="020B0604020202020204" pitchFamily="34" charset="0"/>
+                <a:cs typeface="Arial" panose="020B0604020202020204" pitchFamily="34" charset="0"/>
+              </a:rPr>
+              <a:t>cSt</a:t>
+            </a:r>
+            <a:endParaRPr lang="en-US" dirty="0">
+              <a:latin typeface="Arial" panose="020B0604020202020204" pitchFamily="34" charset="0"/>
+              <a:cs typeface="Arial" panose="020B0604020202020204" pitchFamily="34" charset="0"/>
+            </a:endParaRPr>
+          </a:p>
+        </p:txBody>
+      </p:sp>
+      <p:cxnSp>
+        <p:nvCxnSpPr>
+          <p:cNvPr id="23" name="Straight Arrow Connector 22">
+            <a:extLst>
+              <a:ext uri="{FF2B5EF4-FFF2-40B4-BE49-F238E27FC236}">
+                <a16:creationId xmlns:a16="http://schemas.microsoft.com/office/drawing/2014/main" id="{DE226EBC-02DB-D7EF-5E84-2596CA5C339F}"/>
+              </a:ext>
+            </a:extLst>
+          </p:cNvPr>
+          <p:cNvCxnSpPr>
+            <a:cxnSpLocks/>
+            <a:stCxn id="21" idx="2"/>
+          </p:cNvCxnSpPr>
+          <p:nvPr/>
+        </p:nvCxnSpPr>
+        <p:spPr>
+          <a:xfrm>
+            <a:off x="3746077" y="2508500"/>
+            <a:ext cx="304337" cy="614810"/>
+          </a:xfrm>
+          <a:prstGeom prst="straightConnector1">
+            <a:avLst/>
+          </a:prstGeom>
+          <a:ln>
+            <a:tailEnd type="triangle"/>
+          </a:ln>
+        </p:spPr>
+        <p:style>
+          <a:lnRef idx="1">
+            <a:schemeClr val="accent1"/>
+          </a:lnRef>
+          <a:fillRef idx="0">
+            <a:schemeClr val="accent1"/>
+          </a:fillRef>
+          <a:effectRef idx="0">
+            <a:schemeClr val="accent1"/>
+          </a:effectRef>
+          <a:fontRef idx="minor">
+            <a:schemeClr val="tx1"/>
+          </a:fontRef>
+        </p:style>
+      </p:cxnSp>
+      <p:sp>
+        <p:nvSpPr>
+          <p:cNvPr id="28" name="TextBox 27">
+            <a:extLst>
+              <a:ext uri="{FF2B5EF4-FFF2-40B4-BE49-F238E27FC236}">
+                <a16:creationId xmlns:a16="http://schemas.microsoft.com/office/drawing/2014/main" id="{D2A46E5A-A479-86B2-BD07-CDA6B393EC9C}"/>
+              </a:ext>
+            </a:extLst>
+          </p:cNvPr>
+          <p:cNvSpPr txBox="1"/>
+          <p:nvPr/>
+        </p:nvSpPr>
+        <p:spPr>
+          <a:xfrm>
+            <a:off x="5369794" y="1752307"/>
+            <a:ext cx="1161866" cy="369332"/>
+          </a:xfrm>
+          <a:prstGeom prst="rect">
+            <a:avLst/>
+          </a:prstGeom>
+          <a:noFill/>
+        </p:spPr>
+        <p:txBody>
+          <a:bodyPr wrap="square" rtlCol="0">
+            <a:spAutoFit/>
+          </a:bodyPr>
+          <a:lstStyle/>
+          <a:p>
+            <a:pPr algn="ctr"/>
+            <a:r>
+              <a:rPr lang="en-US" dirty="0">
+                <a:latin typeface="Arial" panose="020B0604020202020204" pitchFamily="34" charset="0"/>
+                <a:cs typeface="Arial" panose="020B0604020202020204" pitchFamily="34" charset="0"/>
+              </a:rPr>
+              <a:t>23.27 </a:t>
+            </a:r>
+            <a:r>
+              <a:rPr lang="en-US" dirty="0" err="1">
+                <a:latin typeface="Arial" panose="020B0604020202020204" pitchFamily="34" charset="0"/>
+                <a:cs typeface="Arial" panose="020B0604020202020204" pitchFamily="34" charset="0"/>
+              </a:rPr>
+              <a:t>cSt</a:t>
+            </a:r>
+            <a:endParaRPr lang="en-US" dirty="0">
+              <a:latin typeface="Arial" panose="020B0604020202020204" pitchFamily="34" charset="0"/>
+              <a:cs typeface="Arial" panose="020B0604020202020204" pitchFamily="34" charset="0"/>
+            </a:endParaRPr>
+          </a:p>
+        </p:txBody>
+      </p:sp>
+      <p:cxnSp>
+        <p:nvCxnSpPr>
+          <p:cNvPr id="29" name="Straight Arrow Connector 28">
+            <a:extLst>
+              <a:ext uri="{FF2B5EF4-FFF2-40B4-BE49-F238E27FC236}">
+                <a16:creationId xmlns:a16="http://schemas.microsoft.com/office/drawing/2014/main" id="{11C1B280-EF7C-C87D-570F-6E4C452F354A}"/>
+              </a:ext>
+            </a:extLst>
+          </p:cNvPr>
+          <p:cNvCxnSpPr>
+            <a:cxnSpLocks/>
+          </p:cNvCxnSpPr>
+          <p:nvPr/>
+        </p:nvCxnSpPr>
+        <p:spPr>
+          <a:xfrm flipH="1">
+            <a:off x="5798928" y="2111369"/>
+            <a:ext cx="192006" cy="434891"/>
+          </a:xfrm>
+          <a:prstGeom prst="straightConnector1">
+            <a:avLst/>
+          </a:prstGeom>
+          <a:ln>
+            <a:tailEnd type="triangle"/>
+          </a:ln>
+        </p:spPr>
+        <p:style>
+          <a:lnRef idx="1">
+            <a:schemeClr val="accent1"/>
+          </a:lnRef>
+          <a:fillRef idx="0">
+            <a:schemeClr val="accent1"/>
+          </a:fillRef>
+          <a:effectRef idx="0">
+            <a:schemeClr val="accent1"/>
+          </a:effectRef>
+          <a:fontRef idx="minor">
+            <a:schemeClr val="tx1"/>
+          </a:fontRef>
+        </p:style>
+      </p:cxnSp>
+    </p:spTree>
+    <p:extLst>
+      <p:ext uri="{BB962C8B-B14F-4D97-AF65-F5344CB8AC3E}">
+        <p14:creationId xmlns:p14="http://schemas.microsoft.com/office/powerpoint/2010/main" val="1774136198"/>
+      </p:ext>
+    </p:extLst>
+  </p:cSld>
+  <p:clrMapOvr>
+    <a:masterClrMapping/>
+  </p:clrMapOvr>
+</p:sld>
+</file>
+
+<file path=ppt/slides/slide12.xml><?xml version="1.0" encoding="utf-8"?>
+<p:sld xmlns:a="http://schemas.openxmlformats.org/drawingml/2006/main" xmlns:r="http://schemas.openxmlformats.org/officeDocument/2006/relationships" xmlns:p="http://schemas.openxmlformats.org/presentationml/2006/main">
+  <p:cSld>
+    <p:spTree>
+      <p:nvGrpSpPr>
+        <p:cNvPr id="1" name=""/>
+        <p:cNvGrpSpPr/>
+        <p:nvPr/>
+      </p:nvGrpSpPr>
+      <p:grpSpPr>
+        <a:xfrm>
+          <a:off x="0" y="0"/>
+          <a:ext cx="0" cy="0"/>
+          <a:chOff x="0" y="0"/>
+          <a:chExt cx="0" cy="0"/>
+        </a:xfrm>
+      </p:grpSpPr>
+      <p:sp>
+        <p:nvSpPr>
+          <p:cNvPr id="2" name="Title 1">
+            <a:extLst>
+              <a:ext uri="{FF2B5EF4-FFF2-40B4-BE49-F238E27FC236}">
+                <a16:creationId xmlns:a16="http://schemas.microsoft.com/office/drawing/2014/main" id="{34254567-C60D-1166-1284-187A94BB68FF}"/>
+              </a:ext>
+            </a:extLst>
+          </p:cNvPr>
+          <p:cNvSpPr>
+            <a:spLocks noGrp="1"/>
+          </p:cNvSpPr>
+          <p:nvPr>
+            <p:ph type="title"/>
+          </p:nvPr>
+        </p:nvSpPr>
+        <p:spPr/>
+        <p:txBody>
+          <a:bodyPr/>
+          <a:lstStyle/>
+          <a:p>
+            <a:r>
+              <a:rPr lang="en-US" dirty="0">
+                <a:latin typeface="Arial" panose="020B0604020202020204" pitchFamily="34" charset="0"/>
+                <a:cs typeface="Arial" panose="020B0604020202020204" pitchFamily="34" charset="0"/>
+              </a:rPr>
+              <a:t>Figure 6</a:t>
+            </a:r>
+          </a:p>
+        </p:txBody>
+      </p:sp>
+      <p:sp>
+        <p:nvSpPr>
+          <p:cNvPr id="4" name="TextBox 3">
+            <a:extLst>
+              <a:ext uri="{FF2B5EF4-FFF2-40B4-BE49-F238E27FC236}">
+                <a16:creationId xmlns:a16="http://schemas.microsoft.com/office/drawing/2014/main" id="{9E8BE728-9050-C8E4-067C-91AA3B928B62}"/>
+              </a:ext>
+            </a:extLst>
+          </p:cNvPr>
+          <p:cNvSpPr txBox="1"/>
+          <p:nvPr/>
+        </p:nvSpPr>
+        <p:spPr>
+          <a:xfrm>
+            <a:off x="62407" y="4520936"/>
+            <a:ext cx="7014972" cy="2308324"/>
+          </a:xfrm>
+          <a:prstGeom prst="rect">
+            <a:avLst/>
+          </a:prstGeom>
+          <a:noFill/>
+        </p:spPr>
+        <p:txBody>
+          <a:bodyPr wrap="square">
+            <a:spAutoFit/>
+          </a:bodyPr>
+          <a:lstStyle/>
+          <a:p>
+            <a:pPr marL="0" marR="0">
+              <a:spcBef>
+                <a:spcPts val="0"/>
+              </a:spcBef>
+              <a:spcAft>
+                <a:spcPts val="0"/>
+              </a:spcAft>
+            </a:pPr>
+            <a:r>
+              <a:rPr lang="en-US" sz="1800" dirty="0">
+                <a:effectLst/>
+                <a:latin typeface="Aptos" panose="020B0004020202020204" pitchFamily="34" charset="0"/>
+                <a:ea typeface="Times New Roman" panose="02020603050405020304" pitchFamily="18" charset="0"/>
+                <a:cs typeface="Aptos" panose="020B0004020202020204" pitchFamily="34" charset="0"/>
+              </a:rPr>
+              <a:t>Console commands to generate this figure with make_histogram.py</a:t>
+            </a:r>
+          </a:p>
+          <a:p>
+            <a:pPr marL="0" marR="0">
+              <a:spcBef>
+                <a:spcPts val="0"/>
+              </a:spcBef>
+              <a:spcAft>
+                <a:spcPts val="0"/>
+              </a:spcAft>
+            </a:pPr>
+            <a:endParaRPr lang="en-US" dirty="0">
+              <a:latin typeface="Aptos" panose="020B0004020202020204" pitchFamily="34" charset="0"/>
+              <a:ea typeface="Times New Roman" panose="02020603050405020304" pitchFamily="18" charset="0"/>
+              <a:cs typeface="Aptos" panose="020B0004020202020204" pitchFamily="34" charset="0"/>
+            </a:endParaRPr>
+          </a:p>
+          <a:p>
+            <a:pPr marL="0" marR="0">
+              <a:spcBef>
+                <a:spcPts val="0"/>
+              </a:spcBef>
+              <a:spcAft>
+                <a:spcPts val="0"/>
+              </a:spcAft>
+            </a:pPr>
+            <a:r>
+              <a:rPr lang="en-US" sz="1800" dirty="0">
+                <a:effectLst/>
+                <a:latin typeface="Aptos" panose="020B0004020202020204" pitchFamily="34" charset="0"/>
+                <a:ea typeface="Times New Roman" panose="02020603050405020304" pitchFamily="18" charset="0"/>
+                <a:cs typeface="Aptos" panose="020B0004020202020204" pitchFamily="34" charset="0"/>
+              </a:rPr>
+              <a:t>cd ~/projects/</a:t>
+            </a:r>
+            <a:r>
+              <a:rPr lang="en-US" sz="1800" dirty="0" err="1">
+                <a:effectLst/>
+                <a:latin typeface="Aptos" panose="020B0004020202020204" pitchFamily="34" charset="0"/>
+                <a:ea typeface="Times New Roman" panose="02020603050405020304" pitchFamily="18" charset="0"/>
+                <a:cs typeface="Aptos" panose="020B0004020202020204" pitchFamily="34" charset="0"/>
+              </a:rPr>
+              <a:t>VisCalcML</a:t>
+            </a:r>
+            <a:r>
+              <a:rPr lang="en-US" sz="1800" dirty="0">
+                <a:effectLst/>
+                <a:latin typeface="Aptos" panose="020B0004020202020204" pitchFamily="34" charset="0"/>
+                <a:ea typeface="Times New Roman" panose="02020603050405020304" pitchFamily="18" charset="0"/>
+                <a:cs typeface="Aptos" panose="020B0004020202020204" pitchFamily="34" charset="0"/>
+              </a:rPr>
+              <a:t>/</a:t>
+            </a:r>
+            <a:endParaRPr lang="en-US" sz="1800" dirty="0">
+              <a:effectLst/>
+              <a:latin typeface="Aptos" panose="020B0004020202020204" pitchFamily="34" charset="0"/>
+              <a:ea typeface="Aptos" panose="020B0004020202020204" pitchFamily="34" charset="0"/>
+              <a:cs typeface="Aptos" panose="020B0004020202020204" pitchFamily="34" charset="0"/>
+            </a:endParaRPr>
+          </a:p>
+          <a:p>
+            <a:pPr marL="0" marR="0">
+              <a:spcBef>
+                <a:spcPts val="0"/>
+              </a:spcBef>
+              <a:spcAft>
+                <a:spcPts val="0"/>
+              </a:spcAft>
+            </a:pPr>
+            <a:r>
+              <a:rPr lang="en-US" sz="1800" dirty="0">
+                <a:effectLst/>
+                <a:latin typeface="Aptos" panose="020B0004020202020204" pitchFamily="34" charset="0"/>
+                <a:ea typeface="Times New Roman" panose="02020603050405020304" pitchFamily="18" charset="0"/>
+                <a:cs typeface="Aptos" panose="020B0004020202020204" pitchFamily="34" charset="0"/>
+              </a:rPr>
+              <a:t>git pull </a:t>
+            </a:r>
+            <a:endParaRPr lang="en-US" sz="1800" dirty="0">
+              <a:effectLst/>
+              <a:latin typeface="Aptos" panose="020B0004020202020204" pitchFamily="34" charset="0"/>
+              <a:ea typeface="Aptos" panose="020B0004020202020204" pitchFamily="34" charset="0"/>
+              <a:cs typeface="Aptos" panose="020B0004020202020204" pitchFamily="34" charset="0"/>
+            </a:endParaRPr>
+          </a:p>
+          <a:p>
+            <a:pPr marL="0" marR="0">
+              <a:spcBef>
+                <a:spcPts val="0"/>
+              </a:spcBef>
+              <a:spcAft>
+                <a:spcPts val="0"/>
+              </a:spcAft>
+            </a:pPr>
+            <a:r>
+              <a:rPr lang="en-US" sz="1800" dirty="0">
+                <a:effectLst/>
+                <a:latin typeface="Aptos" panose="020B0004020202020204" pitchFamily="34" charset="0"/>
+                <a:ea typeface="Times New Roman" panose="02020603050405020304" pitchFamily="18" charset="0"/>
+                <a:cs typeface="Aptos" panose="020B0004020202020204" pitchFamily="34" charset="0"/>
+              </a:rPr>
+              <a:t># If you need my credentials, enter patrickwright8 as username</a:t>
+            </a:r>
+            <a:endParaRPr lang="en-US" sz="1800" dirty="0">
+              <a:effectLst/>
+              <a:latin typeface="Aptos" panose="020B0004020202020204" pitchFamily="34" charset="0"/>
+              <a:ea typeface="Aptos" panose="020B0004020202020204" pitchFamily="34" charset="0"/>
+              <a:cs typeface="Aptos" panose="020B0004020202020204" pitchFamily="34" charset="0"/>
+            </a:endParaRPr>
+          </a:p>
+          <a:p>
+            <a:pPr marL="0" marR="0">
+              <a:spcBef>
+                <a:spcPts val="0"/>
+              </a:spcBef>
+              <a:spcAft>
+                <a:spcPts val="0"/>
+              </a:spcAft>
+            </a:pPr>
+            <a:r>
+              <a:rPr lang="en-US" sz="1800" dirty="0">
+                <a:effectLst/>
+                <a:latin typeface="Aptos" panose="020B0004020202020204" pitchFamily="34" charset="0"/>
+                <a:ea typeface="Times New Roman" panose="02020603050405020304" pitchFamily="18" charset="0"/>
+                <a:cs typeface="Aptos" panose="020B0004020202020204" pitchFamily="34" charset="0"/>
+              </a:rPr>
+              <a:t># Repo token is in a virtual sticky note </a:t>
+            </a:r>
+            <a:endParaRPr lang="en-US" sz="1800" dirty="0">
+              <a:effectLst/>
+              <a:latin typeface="Aptos" panose="020B0004020202020204" pitchFamily="34" charset="0"/>
+              <a:ea typeface="Aptos" panose="020B0004020202020204" pitchFamily="34" charset="0"/>
+              <a:cs typeface="Aptos" panose="020B0004020202020204" pitchFamily="34" charset="0"/>
+            </a:endParaRPr>
+          </a:p>
+          <a:p>
+            <a:pPr marL="0" marR="0">
+              <a:spcBef>
+                <a:spcPts val="0"/>
+              </a:spcBef>
+              <a:spcAft>
+                <a:spcPts val="0"/>
+              </a:spcAft>
+            </a:pPr>
+            <a:r>
+              <a:rPr lang="en-US" sz="1800" dirty="0" err="1">
+                <a:effectLst/>
+                <a:latin typeface="Aptos" panose="020B0004020202020204" pitchFamily="34" charset="0"/>
+                <a:ea typeface="Times New Roman" panose="02020603050405020304" pitchFamily="18" charset="0"/>
+                <a:cs typeface="Aptos" panose="020B0004020202020204" pitchFamily="34" charset="0"/>
+              </a:rPr>
+              <a:t>conda</a:t>
+            </a:r>
+            <a:r>
+              <a:rPr lang="en-US" sz="1800" dirty="0">
+                <a:effectLst/>
+                <a:latin typeface="Aptos" panose="020B0004020202020204" pitchFamily="34" charset="0"/>
+                <a:ea typeface="Times New Roman" panose="02020603050405020304" pitchFamily="18" charset="0"/>
+                <a:cs typeface="Aptos" panose="020B0004020202020204" pitchFamily="34" charset="0"/>
+              </a:rPr>
+              <a:t> activate pao</a:t>
+            </a:r>
+            <a:endParaRPr lang="en-US" sz="1800" dirty="0">
+              <a:effectLst/>
+              <a:latin typeface="Aptos" panose="020B0004020202020204" pitchFamily="34" charset="0"/>
+              <a:ea typeface="Aptos" panose="020B0004020202020204" pitchFamily="34" charset="0"/>
+              <a:cs typeface="Aptos" panose="020B0004020202020204" pitchFamily="34" charset="0"/>
+            </a:endParaRPr>
+          </a:p>
+          <a:p>
+            <a:pPr marL="0" marR="0">
+              <a:spcBef>
+                <a:spcPts val="0"/>
+              </a:spcBef>
+              <a:spcAft>
+                <a:spcPts val="0"/>
+              </a:spcAft>
+            </a:pPr>
+            <a:r>
+              <a:rPr lang="en-US" sz="1800" dirty="0">
+                <a:effectLst/>
+                <a:latin typeface="Aptos" panose="020B0004020202020204" pitchFamily="34" charset="0"/>
+                <a:ea typeface="Times New Roman" panose="02020603050405020304" pitchFamily="18" charset="0"/>
+                <a:cs typeface="Aptos" panose="020B0004020202020204" pitchFamily="34" charset="0"/>
+              </a:rPr>
+              <a:t>python make_histogram.py</a:t>
+            </a:r>
+            <a:endParaRPr lang="en-US" sz="1800" dirty="0">
+              <a:effectLst/>
+              <a:latin typeface="Aptos" panose="020B0004020202020204" pitchFamily="34" charset="0"/>
+              <a:ea typeface="Aptos" panose="020B0004020202020204" pitchFamily="34" charset="0"/>
+              <a:cs typeface="Aptos" panose="020B0004020202020204" pitchFamily="34" charset="0"/>
+            </a:endParaRPr>
+          </a:p>
+        </p:txBody>
+      </p:sp>
+      <p:pic>
+        <p:nvPicPr>
+          <p:cNvPr id="6" name="Picture 5">
+            <a:extLst>
+              <a:ext uri="{FF2B5EF4-FFF2-40B4-BE49-F238E27FC236}">
+                <a16:creationId xmlns:a16="http://schemas.microsoft.com/office/drawing/2014/main" id="{89388D88-6498-D37C-4641-55B19064E545}"/>
+              </a:ext>
+            </a:extLst>
+          </p:cNvPr>
+          <p:cNvPicPr>
+            <a:picLocks noChangeAspect="1"/>
+          </p:cNvPicPr>
+          <p:nvPr/>
+        </p:nvPicPr>
+        <p:blipFill>
+          <a:blip r:embed="rId2">
+            <a:extLst>
+              <a:ext uri="{28A0092B-C50C-407E-A947-70E740481C1C}">
+                <a14:useLocalDpi xmlns:a14="http://schemas.microsoft.com/office/drawing/2010/main" val="0"/>
+              </a:ext>
+            </a:extLst>
+          </a:blip>
+          <a:stretch>
+            <a:fillRect/>
+          </a:stretch>
+        </p:blipFill>
+        <p:spPr>
+          <a:xfrm>
+            <a:off x="6705597" y="1274824"/>
+            <a:ext cx="2819406" cy="1488951"/>
+          </a:xfrm>
+          <a:prstGeom prst="rect">
+            <a:avLst/>
+          </a:prstGeom>
+        </p:spPr>
+      </p:pic>
+      <p:sp>
+        <p:nvSpPr>
+          <p:cNvPr id="20" name="Rectangle 19">
+            <a:extLst>
+              <a:ext uri="{FF2B5EF4-FFF2-40B4-BE49-F238E27FC236}">
+                <a16:creationId xmlns:a16="http://schemas.microsoft.com/office/drawing/2014/main" id="{5E499A8D-882B-AEF3-20EB-520B34CB0254}"/>
+              </a:ext>
+            </a:extLst>
+          </p:cNvPr>
+          <p:cNvSpPr/>
+          <p:nvPr/>
+        </p:nvSpPr>
+        <p:spPr>
+          <a:xfrm>
+            <a:off x="7048500" y="2678841"/>
+            <a:ext cx="1783556" cy="116747"/>
+          </a:xfrm>
+          <a:prstGeom prst="rect">
+            <a:avLst/>
+          </a:prstGeom>
+          <a:solidFill>
+            <a:schemeClr val="bg1"/>
+          </a:solidFill>
+          <a:ln>
+            <a:noFill/>
+          </a:ln>
+        </p:spPr>
+        <p:style>
+          <a:lnRef idx="2">
+            <a:schemeClr val="accent1">
+              <a:shade val="15000"/>
+            </a:schemeClr>
+          </a:lnRef>
+          <a:fillRef idx="1">
+            <a:schemeClr val="accent1"/>
+          </a:fillRef>
+          <a:effectRef idx="0">
+            <a:schemeClr val="accent1"/>
+          </a:effectRef>
+          <a:fontRef idx="minor">
+            <a:schemeClr val="lt1"/>
+          </a:fontRef>
+        </p:style>
+        <p:txBody>
+          <a:bodyPr rtlCol="0" anchor="ctr"/>
+          <a:lstStyle/>
+          <a:p>
+            <a:pPr algn="ctr"/>
+            <a:endParaRPr lang="en-US"/>
+          </a:p>
+        </p:txBody>
+      </p:sp>
+      <p:sp>
+        <p:nvSpPr>
+          <p:cNvPr id="25" name="TextBox 24">
+            <a:extLst>
+              <a:ext uri="{FF2B5EF4-FFF2-40B4-BE49-F238E27FC236}">
+                <a16:creationId xmlns:a16="http://schemas.microsoft.com/office/drawing/2014/main" id="{8AF17FC2-3AD0-E522-8F2E-6161F22C32F7}"/>
+              </a:ext>
+            </a:extLst>
+          </p:cNvPr>
+          <p:cNvSpPr txBox="1"/>
+          <p:nvPr/>
+        </p:nvSpPr>
+        <p:spPr>
+          <a:xfrm>
+            <a:off x="7715694" y="2588262"/>
+            <a:ext cx="341760" cy="276999"/>
+          </a:xfrm>
+          <a:prstGeom prst="rect">
+            <a:avLst/>
+          </a:prstGeom>
+          <a:noFill/>
+        </p:spPr>
+        <p:txBody>
+          <a:bodyPr wrap="none" rtlCol="0">
+            <a:spAutoFit/>
+          </a:bodyPr>
+          <a:lstStyle/>
+          <a:p>
+            <a:r>
+              <a:rPr lang="en-US" sz="1200" dirty="0">
+                <a:cs typeface="Arial" panose="020B0604020202020204" pitchFamily="34" charset="0"/>
+              </a:rPr>
+              <a:t>20</a:t>
+            </a:r>
+          </a:p>
+        </p:txBody>
+      </p:sp>
+      <p:sp>
+        <p:nvSpPr>
+          <p:cNvPr id="27" name="TextBox 26">
+            <a:extLst>
+              <a:ext uri="{FF2B5EF4-FFF2-40B4-BE49-F238E27FC236}">
+                <a16:creationId xmlns:a16="http://schemas.microsoft.com/office/drawing/2014/main" id="{66EEA9A5-D595-7573-A974-16AE84764938}"/>
+              </a:ext>
+            </a:extLst>
+          </p:cNvPr>
+          <p:cNvSpPr txBox="1"/>
+          <p:nvPr/>
+        </p:nvSpPr>
+        <p:spPr>
+          <a:xfrm>
+            <a:off x="8492678" y="2588261"/>
+            <a:ext cx="341760" cy="276999"/>
+          </a:xfrm>
+          <a:prstGeom prst="rect">
+            <a:avLst/>
+          </a:prstGeom>
+          <a:noFill/>
+        </p:spPr>
+        <p:txBody>
+          <a:bodyPr wrap="none" rtlCol="0">
+            <a:spAutoFit/>
+          </a:bodyPr>
+          <a:lstStyle/>
+          <a:p>
+            <a:r>
+              <a:rPr lang="en-US" sz="1200" dirty="0">
+                <a:cs typeface="Arial" panose="020B0604020202020204" pitchFamily="34" charset="0"/>
+              </a:rPr>
+              <a:t>40</a:t>
+            </a:r>
+          </a:p>
+        </p:txBody>
+      </p:sp>
+      <p:sp>
+        <p:nvSpPr>
+          <p:cNvPr id="30" name="TextBox 29">
+            <a:extLst>
+              <a:ext uri="{FF2B5EF4-FFF2-40B4-BE49-F238E27FC236}">
+                <a16:creationId xmlns:a16="http://schemas.microsoft.com/office/drawing/2014/main" id="{849A726A-F3C4-0A0E-C2C8-C9F46E0C36DB}"/>
+              </a:ext>
+            </a:extLst>
+          </p:cNvPr>
+          <p:cNvSpPr txBox="1"/>
+          <p:nvPr/>
+        </p:nvSpPr>
+        <p:spPr>
+          <a:xfrm>
+            <a:off x="6974940" y="2589144"/>
+            <a:ext cx="263214" cy="276999"/>
+          </a:xfrm>
+          <a:prstGeom prst="rect">
+            <a:avLst/>
+          </a:prstGeom>
+          <a:noFill/>
+        </p:spPr>
+        <p:txBody>
+          <a:bodyPr wrap="none" rtlCol="0">
+            <a:spAutoFit/>
+          </a:bodyPr>
+          <a:lstStyle/>
+          <a:p>
+            <a:r>
+              <a:rPr lang="en-US" sz="1200" dirty="0">
+                <a:cs typeface="Arial" panose="020B0604020202020204" pitchFamily="34" charset="0"/>
+              </a:rPr>
+              <a:t>0</a:t>
+            </a:r>
+          </a:p>
+        </p:txBody>
+      </p:sp>
+      <p:sp>
+        <p:nvSpPr>
+          <p:cNvPr id="31" name="Rectangle 30">
+            <a:extLst>
+              <a:ext uri="{FF2B5EF4-FFF2-40B4-BE49-F238E27FC236}">
+                <a16:creationId xmlns:a16="http://schemas.microsoft.com/office/drawing/2014/main" id="{4ACF419E-8D93-BF5F-14B7-C325A23465F3}"/>
+              </a:ext>
+            </a:extLst>
+          </p:cNvPr>
+          <p:cNvSpPr/>
+          <p:nvPr/>
+        </p:nvSpPr>
+        <p:spPr>
+          <a:xfrm>
+            <a:off x="7048500" y="1274824"/>
+            <a:ext cx="263214" cy="147576"/>
+          </a:xfrm>
+          <a:prstGeom prst="rect">
+            <a:avLst/>
+          </a:prstGeom>
+          <a:solidFill>
+            <a:schemeClr val="bg1"/>
+          </a:solidFill>
+          <a:ln>
+            <a:noFill/>
+          </a:ln>
+        </p:spPr>
+        <p:style>
+          <a:lnRef idx="2">
+            <a:schemeClr val="accent1">
+              <a:shade val="15000"/>
+            </a:schemeClr>
+          </a:lnRef>
+          <a:fillRef idx="1">
+            <a:schemeClr val="accent1"/>
+          </a:fillRef>
+          <a:effectRef idx="0">
+            <a:schemeClr val="accent1"/>
+          </a:effectRef>
+          <a:fontRef idx="minor">
+            <a:schemeClr val="lt1"/>
+          </a:fontRef>
+        </p:style>
+        <p:txBody>
+          <a:bodyPr rtlCol="0" anchor="ctr"/>
+          <a:lstStyle/>
+          <a:p>
+            <a:pPr algn="ctr"/>
+            <a:endParaRPr lang="en-US"/>
+          </a:p>
+        </p:txBody>
+      </p:sp>
+      <p:sp>
+        <p:nvSpPr>
+          <p:cNvPr id="32" name="TextBox 31">
+            <a:extLst>
+              <a:ext uri="{FF2B5EF4-FFF2-40B4-BE49-F238E27FC236}">
+                <a16:creationId xmlns:a16="http://schemas.microsoft.com/office/drawing/2014/main" id="{BA394BE9-53A5-81BB-08DA-9413B08EDD85}"/>
+              </a:ext>
+            </a:extLst>
+          </p:cNvPr>
+          <p:cNvSpPr txBox="1"/>
+          <p:nvPr/>
+        </p:nvSpPr>
+        <p:spPr>
+          <a:xfrm>
+            <a:off x="7077379" y="2853472"/>
+            <a:ext cx="2370016" cy="307777"/>
+          </a:xfrm>
+          <a:prstGeom prst="rect">
+            <a:avLst/>
+          </a:prstGeom>
+          <a:noFill/>
+        </p:spPr>
+        <p:txBody>
+          <a:bodyPr wrap="square" rtlCol="0">
+            <a:spAutoFit/>
+          </a:bodyPr>
+          <a:lstStyle/>
+          <a:p>
+            <a:pPr algn="ctr"/>
+            <a:r>
+              <a:rPr lang="en-US" sz="1400" dirty="0">
+                <a:latin typeface="Arial" panose="020B0604020202020204" pitchFamily="34" charset="0"/>
+                <a:cs typeface="Arial" panose="020B0604020202020204" pitchFamily="34" charset="0"/>
+              </a:rPr>
+              <a:t>Predicted KV40 (</a:t>
+            </a:r>
+            <a:r>
+              <a:rPr lang="en-US" sz="1400" dirty="0" err="1">
+                <a:latin typeface="Arial" panose="020B0604020202020204" pitchFamily="34" charset="0"/>
+                <a:cs typeface="Arial" panose="020B0604020202020204" pitchFamily="34" charset="0"/>
+              </a:rPr>
+              <a:t>cSt</a:t>
+            </a:r>
+            <a:r>
+              <a:rPr lang="en-US" sz="1400" dirty="0">
+                <a:latin typeface="Arial" panose="020B0604020202020204" pitchFamily="34" charset="0"/>
+                <a:cs typeface="Arial" panose="020B0604020202020204" pitchFamily="34" charset="0"/>
+              </a:rPr>
+              <a:t>)</a:t>
+            </a:r>
+          </a:p>
+        </p:txBody>
+      </p:sp>
+      <p:sp>
+        <p:nvSpPr>
+          <p:cNvPr id="33" name="TextBox 32">
+            <a:extLst>
+              <a:ext uri="{FF2B5EF4-FFF2-40B4-BE49-F238E27FC236}">
+                <a16:creationId xmlns:a16="http://schemas.microsoft.com/office/drawing/2014/main" id="{2E593CC7-A503-0B17-9073-79DEB32DE169}"/>
+              </a:ext>
+            </a:extLst>
+          </p:cNvPr>
+          <p:cNvSpPr txBox="1"/>
+          <p:nvPr/>
+        </p:nvSpPr>
+        <p:spPr>
+          <a:xfrm rot="16200000">
+            <a:off x="5257019" y="1908896"/>
+            <a:ext cx="2565393" cy="307777"/>
+          </a:xfrm>
+          <a:prstGeom prst="rect">
+            <a:avLst/>
+          </a:prstGeom>
+          <a:noFill/>
+        </p:spPr>
+        <p:txBody>
+          <a:bodyPr wrap="square" rtlCol="0">
+            <a:spAutoFit/>
+          </a:bodyPr>
+          <a:lstStyle/>
+          <a:p>
+            <a:pPr algn="ctr"/>
+            <a:r>
+              <a:rPr lang="en-US" sz="1400" dirty="0">
+                <a:latin typeface="Arial" panose="020B0604020202020204" pitchFamily="34" charset="0"/>
+                <a:cs typeface="Arial" panose="020B0604020202020204" pitchFamily="34" charset="0"/>
+              </a:rPr>
+              <a:t>Occurrences (× 10</a:t>
+            </a:r>
+            <a:r>
+              <a:rPr lang="en-US" sz="1400" baseline="30000" dirty="0">
+                <a:latin typeface="Arial" panose="020B0604020202020204" pitchFamily="34" charset="0"/>
+                <a:cs typeface="Arial" panose="020B0604020202020204" pitchFamily="34" charset="0"/>
+              </a:rPr>
+              <a:t>8</a:t>
+            </a:r>
+            <a:r>
+              <a:rPr lang="en-US" sz="1400" dirty="0">
+                <a:latin typeface="Arial" panose="020B0604020202020204" pitchFamily="34" charset="0"/>
+                <a:cs typeface="Arial" panose="020B0604020202020204" pitchFamily="34" charset="0"/>
+              </a:rPr>
+              <a:t>)</a:t>
+            </a:r>
+          </a:p>
+        </p:txBody>
+      </p:sp>
+    </p:spTree>
+    <p:extLst>
+      <p:ext uri="{BB962C8B-B14F-4D97-AF65-F5344CB8AC3E}">
+        <p14:creationId xmlns:p14="http://schemas.microsoft.com/office/powerpoint/2010/main" val="1550526777"/>
+      </p:ext>
+    </p:extLst>
+  </p:cSld>
+  <p:clrMapOvr>
+    <a:masterClrMapping/>
+  </p:clrMapOvr>
+</p:sld>
+</file>
+
+<file path=ppt/slides/slide13.xml><?xml version="1.0" encoding="utf-8"?>
+<p:sld xmlns:a="http://schemas.openxmlformats.org/drawingml/2006/main" xmlns:r="http://schemas.openxmlformats.org/officeDocument/2006/relationships" xmlns:p="http://schemas.openxmlformats.org/presentationml/2006/main">
+  <p:cSld>
+    <p:spTree>
+      <p:nvGrpSpPr>
+        <p:cNvPr id="1" name=""/>
+        <p:cNvGrpSpPr/>
+        <p:nvPr/>
+      </p:nvGrpSpPr>
+      <p:grpSpPr>
+        <a:xfrm>
+          <a:off x="0" y="0"/>
+          <a:ext cx="0" cy="0"/>
+          <a:chOff x="0" y="0"/>
+          <a:chExt cx="0" cy="0"/>
+        </a:xfrm>
+      </p:grpSpPr>
+      <p:sp>
+        <p:nvSpPr>
+          <p:cNvPr id="2" name="Title 1">
+            <a:extLst>
+              <a:ext uri="{FF2B5EF4-FFF2-40B4-BE49-F238E27FC236}">
                 <a16:creationId xmlns:a16="http://schemas.microsoft.com/office/drawing/2014/main" id="{0055DEA2-4B2D-BBA2-ED5A-33E24C1AC4FD}"/>
               </a:ext>
             </a:extLst>
@@ -19755,7 +21537,7 @@
 </p:sld>
 </file>
 
-<file path=ppt/slides/slide11.xml><?xml version="1.0" encoding="utf-8"?>
+<file path=ppt/slides/slide14.xml><?xml version="1.0" encoding="utf-8"?>
 <p:sld xmlns:a="http://schemas.openxmlformats.org/drawingml/2006/main" xmlns:r="http://schemas.openxmlformats.org/officeDocument/2006/relationships" xmlns:p="http://schemas.openxmlformats.org/presentationml/2006/main">
   <p:cSld>
     <p:spTree>
@@ -19847,7 +21629,7 @@
 </p:sld>
 </file>
 
-<file path=ppt/slides/slide12.xml><?xml version="1.0" encoding="utf-8"?>
+<file path=ppt/slides/slide15.xml><?xml version="1.0" encoding="utf-8"?>
 <p:sld xmlns:a="http://schemas.openxmlformats.org/drawingml/2006/main" xmlns:r="http://schemas.openxmlformats.org/officeDocument/2006/relationships" xmlns:p="http://schemas.openxmlformats.org/presentationml/2006/main">
   <p:cSld>
     <p:spTree>
@@ -19953,7 +21735,7 @@
 </p:sld>
 </file>
 
-<file path=ppt/slides/slide13.xml><?xml version="1.0" encoding="utf-8"?>
+<file path=ppt/slides/slide16.xml><?xml version="1.0" encoding="utf-8"?>
 <p:sld xmlns:a="http://schemas.openxmlformats.org/drawingml/2006/main" xmlns:r="http://schemas.openxmlformats.org/officeDocument/2006/relationships" xmlns:p="http://schemas.openxmlformats.org/presentationml/2006/main">
   <p:cSld>
     <p:spTree>
@@ -20039,7 +21821,7 @@
 </p:sld>
 </file>
 
-<file path=ppt/slides/slide14.xml><?xml version="1.0" encoding="utf-8"?>
+<file path=ppt/slides/slide17.xml><?xml version="1.0" encoding="utf-8"?>
 <p:sld xmlns:a="http://schemas.openxmlformats.org/drawingml/2006/main" xmlns:r="http://schemas.openxmlformats.org/officeDocument/2006/relationships" xmlns:p="http://schemas.openxmlformats.org/presentationml/2006/main">
   <p:cSld>
     <p:spTree>
@@ -20332,7 +22114,7 @@
 </p:sld>
 </file>
 
-<file path=ppt/slides/slide15.xml><?xml version="1.0" encoding="utf-8"?>
+<file path=ppt/slides/slide18.xml><?xml version="1.0" encoding="utf-8"?>
 <p:sld xmlns:a="http://schemas.openxmlformats.org/drawingml/2006/main" xmlns:r="http://schemas.openxmlformats.org/officeDocument/2006/relationships" xmlns:p="http://schemas.openxmlformats.org/presentationml/2006/main">
   <p:cSld>
     <p:spTree>
